--- a/docs/pptx/whole/jx-ratio-by-age70.pptx
+++ b/docs/pptx/whole/jx-ratio-by-age70.pptx
@@ -13100,7 +13100,7 @@
           <p:spPr>
             <a:xfrm>
               <a:off x="951755" y="1923572"/>
-              <a:ext cx="4985674" cy="82021"/>
+              <a:ext cx="5373014" cy="82021"/>
             </a:xfrm>
             <a:prstGeom prst="rect">
               <a:avLst/>
@@ -13132,7 +13132,7 @@
                   <a:latin typeface="Helvetica"/>
                   <a:cs typeface="Helvetica"/>
                 </a:rPr>
-                <a:t>Age &gt;= 70: N = 340, median = 1.06   |   Age &lt; 70: N = 603, median = 0.97   |   Wilcoxon p = &lt;0.001</a:t>
+                <a:t>Age &gt;= 70: N = 340, median = 1.06   |   Age &lt; 70: N = 603, median = 0.97   |   Mann-Whitney U p = &lt;0.001</a:t>
               </a:r>
             </a:p>
           </p:txBody>
